--- a/LLM_Reliability_Lab_Presentation.pptx
+++ b/LLM_Reliability_Lab_Presentation.pptx
@@ -3234,7 +3234,7 @@
               </a:defRPr>
             </a:pPr>
             <a:r>
-              <a:t>Built by: Prateek Yadav (TechPrateek) • Powered by Unstop &amp; Lovable</a:t>
+              <a:t>Built by: Prateek Yadav (TechPrateek) • Hack Devengers 2.0</a:t>
             </a:r>
           </a:p>
           <a:p>
